--- a/Eccles_MBA_Interview_Prep_Student_Overview.pptx
+++ b/Eccles_MBA_Interview_Prep_Student_Overview.pptx
@@ -1481,7 +1481,7 @@
           <a:p>
             <a:r>
               <a:rPr lang="en-US" dirty="0"/>
-              <a:t>Demo the AI coach live if presenting: open the playbook, filter to a role, hit 'Practice with AI' on one question, and show the generated prompt — including the line ordering the AI not to flatter you. Explain why retired questions are safe to practice: live interviews use different questions on the same competencies, so practicing the competency, not the sentence, is the entire method. That's also why memorizing these answers is useless and building evidence is not.</a:t>
+              <a:t>The Mock Interview Lifecycle is the headline: it runs students through all four stages with speech-to-text answers, stage-by-stage AI scoring on the real rubric, and the same gates and thresholds employers apply. Demo the AI coach live if presenting: open the playbook, filter to a role, hit 'Practice with AI' on one question, and show the generated prompt — including the line ordering the AI not to flatter you. Explain why retired questions are safe to practice: live interviews use different questions on the same competencies, so practicing the competency, not the sentence, is the entire method. That's also why memorizing these answers is useless and building evidence is not.</a:t>
             </a:r>
             <a:endParaRPr lang="en-US" dirty="0"/>
           </a:p>
@@ -3448,7 +3448,7 @@
                 <a:ea typeface="Calibri" pitchFamily="34" charset="-122"/>
                 <a:cs typeface="Calibri" pitchFamily="34" charset="-120"/>
               </a:rPr>
-              <a:t>Practice out loud with the retired bank + AI coach · peer mocks · re-run to a 4</a:t>
+              <a:t>Retired bank + AI coach · full Mock Interview Lifecycle runs · peer mocks · re-run to a 4</a:t>
             </a:r>
             <a:endParaRPr lang="en-US" sz="1450" dirty="0"/>
           </a:p>
@@ -8342,11 +8342,11 @@
         <p:spPr>
           <a:xfrm>
             <a:off x="548640" y="1508760"/>
-            <a:ext cx="3593592" cy="3017520"/>
+            <a:ext cx="2615184" cy="3017520"/>
           </a:xfrm>
           <a:prstGeom prst="roundRect">
             <a:avLst>
-              <a:gd name="adj" fmla="val 2424"/>
+              <a:gd name="adj" fmla="val 2797"/>
             </a:avLst>
           </a:prstGeom>
           <a:solidFill>
@@ -8368,24 +8368,24 @@
         </p:nvSpPr>
         <p:spPr>
           <a:xfrm>
-            <a:off x="777240" y="1737360"/>
-            <a:ext cx="3154680" cy="457200"/>
-          </a:xfrm>
-          <a:prstGeom prst="rect">
-            <a:avLst/>
-          </a:prstGeom>
-          <a:noFill/>
-          <a:ln/>
-        </p:spPr>
-        <p:txBody>
-          <a:bodyPr wrap="square" lIns="0" tIns="0" rIns="0" bIns="0" rtlCol="0" anchor="ctr"/>
-          <a:lstStyle/>
-          <a:p>
-            <a:pPr indent="0" marL="0">
-              <a:buNone/>
-            </a:pPr>
-            <a:r>
-              <a:rPr lang="en-US" sz="1550" b="1" dirty="0">
+            <a:off x="731520" y="1691640"/>
+            <a:ext cx="2249424" cy="685800"/>
+          </a:xfrm>
+          <a:prstGeom prst="rect">
+            <a:avLst/>
+          </a:prstGeom>
+          <a:noFill/>
+          <a:ln/>
+        </p:spPr>
+        <p:txBody>
+          <a:bodyPr wrap="square" lIns="0" tIns="0" rIns="0" bIns="0" rtlCol="0" anchor="ctr"/>
+          <a:lstStyle/>
+          <a:p>
+            <a:pPr indent="0" marL="0">
+              <a:buNone/>
+            </a:pPr>
+            <a:r>
+              <a:rPr lang="en-US" sz="1400" b="1" dirty="0">
                 <a:solidFill>
                   <a:srgbClr val="890000"/>
                 </a:solidFill>
@@ -8395,7 +8395,7 @@
               </a:rPr>
               <a:t>Retired question bank</a:t>
             </a:r>
-            <a:endParaRPr lang="en-US" sz="1550" dirty="0"/>
+            <a:endParaRPr lang="en-US" sz="1400" dirty="0"/>
           </a:p>
         </p:txBody>
       </p:sp>
@@ -8407,24 +8407,24 @@
         </p:nvSpPr>
         <p:spPr>
           <a:xfrm>
-            <a:off x="777240" y="2331720"/>
-            <a:ext cx="3154680" cy="2011680"/>
-          </a:xfrm>
-          <a:prstGeom prst="rect">
-            <a:avLst/>
-          </a:prstGeom>
-          <a:noFill/>
-          <a:ln/>
-        </p:spPr>
-        <p:txBody>
-          <a:bodyPr wrap="square" lIns="0" tIns="0" rIns="0" bIns="0" rtlCol="0" anchor="ctr"/>
-          <a:lstStyle/>
-          <a:p>
-            <a:pPr indent="0" marL="0">
-              <a:buNone/>
-            </a:pPr>
-            <a:r>
-              <a:rPr lang="en-US" sz="1250" dirty="0">
+            <a:off x="731520" y="2468880"/>
+            <a:ext cx="2249424" cy="1920240"/>
+          </a:xfrm>
+          <a:prstGeom prst="rect">
+            <a:avLst/>
+          </a:prstGeom>
+          <a:noFill/>
+          <a:ln/>
+        </p:spPr>
+        <p:txBody>
+          <a:bodyPr wrap="square" lIns="0" tIns="0" rIns="0" bIns="0" rtlCol="0" anchor="ctr"/>
+          <a:lstStyle/>
+          <a:p>
+            <a:pPr indent="0" marL="0">
+              <a:buNone/>
+            </a:pPr>
+            <a:r>
+              <a:rPr lang="en-US" sz="1150" dirty="0">
                 <a:solidFill>
                   <a:srgbClr val="262626"/>
                 </a:solidFill>
@@ -8432,9 +8432,9 @@
                 <a:ea typeface="Calibri" pitchFamily="34" charset="-122"/>
                 <a:cs typeface="Calibri" pitchFamily="34" charset="-120"/>
               </a:rPr>
-              <a:t>120 real questions + 20 role screens from a retired employer pack — filter by role, start with your gates.</a:t>
-            </a:r>
-            <a:endParaRPr lang="en-US" sz="1250" dirty="0"/>
+              <a:t>120 real questions + 20 role screens — filter by role, start with your gates.</a:t>
+            </a:r>
+            <a:endParaRPr lang="en-US" sz="1150" dirty="0"/>
           </a:p>
         </p:txBody>
       </p:sp>
@@ -8446,12 +8446,12 @@
         </p:nvSpPr>
         <p:spPr>
           <a:xfrm>
-            <a:off x="4297680" y="1508760"/>
-            <a:ext cx="3593592" cy="3017520"/>
+            <a:off x="3419856" y="1508760"/>
+            <a:ext cx="2615184" cy="3017520"/>
           </a:xfrm>
           <a:prstGeom prst="roundRect">
             <a:avLst>
-              <a:gd name="adj" fmla="val 2424"/>
+              <a:gd name="adj" fmla="val 2797"/>
             </a:avLst>
           </a:prstGeom>
           <a:solidFill>
@@ -8473,24 +8473,24 @@
         </p:nvSpPr>
         <p:spPr>
           <a:xfrm>
-            <a:off x="4526280" y="1737360"/>
-            <a:ext cx="3154680" cy="457200"/>
-          </a:xfrm>
-          <a:prstGeom prst="rect">
-            <a:avLst/>
-          </a:prstGeom>
-          <a:noFill/>
-          <a:ln/>
-        </p:spPr>
-        <p:txBody>
-          <a:bodyPr wrap="square" lIns="0" tIns="0" rIns="0" bIns="0" rtlCol="0" anchor="ctr"/>
-          <a:lstStyle/>
-          <a:p>
-            <a:pPr indent="0" marL="0">
-              <a:buNone/>
-            </a:pPr>
-            <a:r>
-              <a:rPr lang="en-US" sz="1550" b="1" dirty="0">
+            <a:off x="3602736" y="1691640"/>
+            <a:ext cx="2249424" cy="685800"/>
+          </a:xfrm>
+          <a:prstGeom prst="rect">
+            <a:avLst/>
+          </a:prstGeom>
+          <a:noFill/>
+          <a:ln/>
+        </p:spPr>
+        <p:txBody>
+          <a:bodyPr wrap="square" lIns="0" tIns="0" rIns="0" bIns="0" rtlCol="0" anchor="ctr"/>
+          <a:lstStyle/>
+          <a:p>
+            <a:pPr indent="0" marL="0">
+              <a:buNone/>
+            </a:pPr>
+            <a:r>
+              <a:rPr lang="en-US" sz="1400" b="1" dirty="0">
                 <a:solidFill>
                   <a:srgbClr val="890000"/>
                 </a:solidFill>
@@ -8498,9 +8498,9 @@
                 <a:ea typeface="Cambria" pitchFamily="34" charset="-122"/>
                 <a:cs typeface="Cambria" pitchFamily="34" charset="-120"/>
               </a:rPr>
-              <a:t>AI practice coach</a:t>
-            </a:r>
-            <a:endParaRPr lang="en-US" sz="1550" dirty="0"/>
+              <a:t>AI coach, per question</a:t>
+            </a:r>
+            <a:endParaRPr lang="en-US" sz="1400" dirty="0"/>
           </a:p>
         </p:txBody>
       </p:sp>
@@ -8512,24 +8512,24 @@
         </p:nvSpPr>
         <p:spPr>
           <a:xfrm>
-            <a:off x="4526280" y="2331720"/>
-            <a:ext cx="3154680" cy="2011680"/>
-          </a:xfrm>
-          <a:prstGeom prst="rect">
-            <a:avLst/>
-          </a:prstGeom>
-          <a:noFill/>
-          <a:ln/>
-        </p:spPr>
-        <p:txBody>
-          <a:bodyPr wrap="square" lIns="0" tIns="0" rIns="0" bIns="0" rtlCol="0" anchor="ctr"/>
-          <a:lstStyle/>
-          <a:p>
-            <a:pPr indent="0" marL="0">
-              <a:buNone/>
-            </a:pPr>
-            <a:r>
-              <a:rPr lang="en-US" sz="1250" dirty="0">
+            <a:off x="3602736" y="2468880"/>
+            <a:ext cx="2249424" cy="1920240"/>
+          </a:xfrm>
+          <a:prstGeom prst="rect">
+            <a:avLst/>
+          </a:prstGeom>
+          <a:noFill/>
+          <a:ln/>
+        </p:spPr>
+        <p:txBody>
+          <a:bodyPr wrap="square" lIns="0" tIns="0" rIns="0" bIns="0" rtlCol="0" anchor="ctr"/>
+          <a:lstStyle/>
+          <a:p>
+            <a:pPr indent="0" marL="0">
+              <a:buNone/>
+            </a:pPr>
+            <a:r>
+              <a:rPr lang="en-US" sz="1150" dirty="0">
                 <a:solidFill>
                   <a:srgbClr val="262626"/>
                 </a:solidFill>
@@ -8537,9 +8537,9 @@
                 <a:ea typeface="Calibri" pitchFamily="34" charset="-122"/>
                 <a:cs typeface="Calibri" pitchFamily="34" charset="-120"/>
               </a:rPr>
-              <a:t>One click per question: the AI interviews you, probes like a trained interviewer, scores on the exact rubric, and names the one change that raises each score a level.</a:t>
-            </a:r>
-            <a:endParaRPr lang="en-US" sz="1250" dirty="0"/>
+              <a:t>One click: the AI interviews you, probes, scores on the exact rubric, names the one upgrade.</a:t>
+            </a:r>
+            <a:endParaRPr lang="en-US" sz="1150" dirty="0"/>
           </a:p>
         </p:txBody>
       </p:sp>
@@ -8551,12 +8551,117 @@
         </p:nvSpPr>
         <p:spPr>
           <a:xfrm>
-            <a:off x="8046720" y="1508760"/>
-            <a:ext cx="3593592" cy="3017520"/>
+            <a:off x="6291072" y="1508760"/>
+            <a:ext cx="2615184" cy="3017520"/>
           </a:xfrm>
           <a:prstGeom prst="roundRect">
             <a:avLst>
-              <a:gd name="adj" fmla="val 2424"/>
+              <a:gd name="adj" fmla="val 2797"/>
+            </a:avLst>
+          </a:prstGeom>
+          <a:solidFill>
+            <a:srgbClr val="F1F5EC"/>
+          </a:solidFill>
+          <a:ln w="9525">
+            <a:solidFill>
+              <a:srgbClr val="E2E6E6"/>
+            </a:solidFill>
+            <a:prstDash val="solid"/>
+          </a:ln>
+        </p:spPr>
+      </p:sp>
+      <p:sp>
+        <p:nvSpPr>
+          <p:cNvPr id="11" name="Text 9"/>
+          <p:cNvSpPr/>
+          <p:nvPr/>
+        </p:nvSpPr>
+        <p:spPr>
+          <a:xfrm>
+            <a:off x="6473952" y="1691640"/>
+            <a:ext cx="2249424" cy="685800"/>
+          </a:xfrm>
+          <a:prstGeom prst="rect">
+            <a:avLst/>
+          </a:prstGeom>
+          <a:noFill/>
+          <a:ln/>
+        </p:spPr>
+        <p:txBody>
+          <a:bodyPr wrap="square" lIns="0" tIns="0" rIns="0" bIns="0" rtlCol="0" anchor="ctr"/>
+          <a:lstStyle/>
+          <a:p>
+            <a:pPr indent="0" marL="0">
+              <a:buNone/>
+            </a:pPr>
+            <a:r>
+              <a:rPr lang="en-US" sz="1400" b="1" dirty="0">
+                <a:solidFill>
+                  <a:srgbClr val="3B6D11"/>
+                </a:solidFill>
+                <a:latin typeface="Cambria" pitchFamily="34" charset="0"/>
+                <a:ea typeface="Cambria" pitchFamily="34" charset="-122"/>
+                <a:cs typeface="Cambria" pitchFamily="34" charset="-120"/>
+              </a:rPr>
+              <a:t>Mock Interview Lifecycle</a:t>
+            </a:r>
+            <a:endParaRPr lang="en-US" sz="1400" dirty="0"/>
+          </a:p>
+        </p:txBody>
+      </p:sp>
+      <p:sp>
+        <p:nvSpPr>
+          <p:cNvPr id="12" name="Text 10"/>
+          <p:cNvSpPr/>
+          <p:nvPr/>
+        </p:nvSpPr>
+        <p:spPr>
+          <a:xfrm>
+            <a:off x="6473952" y="2468880"/>
+            <a:ext cx="2249424" cy="1920240"/>
+          </a:xfrm>
+          <a:prstGeom prst="rect">
+            <a:avLst/>
+          </a:prstGeom>
+          <a:noFill/>
+          <a:ln/>
+        </p:spPr>
+        <p:txBody>
+          <a:bodyPr wrap="square" lIns="0" tIns="0" rIns="0" bIns="0" rtlCol="0" anchor="ctr"/>
+          <a:lstStyle/>
+          <a:p>
+            <a:pPr indent="0" marL="0">
+              <a:buNone/>
+            </a:pPr>
+            <a:r>
+              <a:rPr lang="en-US" sz="1150" dirty="0">
+                <a:solidFill>
+                  <a:srgbClr val="262626"/>
+                </a:solidFill>
+                <a:latin typeface="Calibri" pitchFamily="34" charset="0"/>
+                <a:ea typeface="Calibri" pitchFamily="34" charset="-122"/>
+                <a:cs typeface="Calibri" pitchFamily="34" charset="-120"/>
+              </a:rPr>
+              <a:t>All four stages, spoken answers auto-transcribed, one coaching prompt per stage, gates and thresholds tracked like a real scorecard.</a:t>
+            </a:r>
+            <a:endParaRPr lang="en-US" sz="1150" dirty="0"/>
+          </a:p>
+        </p:txBody>
+      </p:sp>
+      <p:sp>
+        <p:nvSpPr>
+          <p:cNvPr id="13" name="Shape 11"/>
+          <p:cNvSpPr/>
+          <p:nvPr/>
+        </p:nvSpPr>
+        <p:spPr>
+          <a:xfrm>
+            <a:off x="9162288" y="1508760"/>
+            <a:ext cx="2615184" cy="3017520"/>
+          </a:xfrm>
+          <a:prstGeom prst="roundRect">
+            <a:avLst>
+              <a:gd name="adj" fmla="val 2797"/>
             </a:avLst>
           </a:prstGeom>
           <a:solidFill>
@@ -8572,30 +8677,30 @@
       </p:sp>
       <p:sp>
         <p:nvSpPr>
-          <p:cNvPr id="11" name="Text 9"/>
-          <p:cNvSpPr/>
-          <p:nvPr/>
-        </p:nvSpPr>
-        <p:spPr>
-          <a:xfrm>
-            <a:off x="8275320" y="1737360"/>
-            <a:ext cx="3154680" cy="457200"/>
-          </a:xfrm>
-          <a:prstGeom prst="rect">
-            <a:avLst/>
-          </a:prstGeom>
-          <a:noFill/>
-          <a:ln/>
-        </p:spPr>
-        <p:txBody>
-          <a:bodyPr wrap="square" lIns="0" tIns="0" rIns="0" bIns="0" rtlCol="0" anchor="ctr"/>
-          <a:lstStyle/>
-          <a:p>
-            <a:pPr indent="0" marL="0">
-              <a:buNone/>
-            </a:pPr>
-            <a:r>
-              <a:rPr lang="en-US" sz="1550" b="1" dirty="0">
+          <p:cNvPr id="14" name="Text 12"/>
+          <p:cNvSpPr/>
+          <p:nvPr/>
+        </p:nvSpPr>
+        <p:spPr>
+          <a:xfrm>
+            <a:off x="9345168" y="1691640"/>
+            <a:ext cx="2249424" cy="685800"/>
+          </a:xfrm>
+          <a:prstGeom prst="rect">
+            <a:avLst/>
+          </a:prstGeom>
+          <a:noFill/>
+          <a:ln/>
+        </p:spPr>
+        <p:txBody>
+          <a:bodyPr wrap="square" lIns="0" tIns="0" rIns="0" bIns="0" rtlCol="0" anchor="ctr"/>
+          <a:lstStyle/>
+          <a:p>
+            <a:pPr indent="0" marL="0">
+              <a:buNone/>
+            </a:pPr>
+            <a:r>
+              <a:rPr lang="en-US" sz="1400" b="1" dirty="0">
                 <a:solidFill>
                   <a:srgbClr val="890000"/>
                 </a:solidFill>
@@ -8605,36 +8710,36 @@
               </a:rPr>
               <a:t>Peer mocks</a:t>
             </a:r>
-            <a:endParaRPr lang="en-US" sz="1550" dirty="0"/>
-          </a:p>
-        </p:txBody>
-      </p:sp>
-      <p:sp>
-        <p:nvSpPr>
-          <p:cNvPr id="12" name="Text 10"/>
-          <p:cNvSpPr/>
-          <p:nvPr/>
-        </p:nvSpPr>
-        <p:spPr>
-          <a:xfrm>
-            <a:off x="8275320" y="2331720"/>
-            <a:ext cx="3154680" cy="2011680"/>
-          </a:xfrm>
-          <a:prstGeom prst="rect">
-            <a:avLst/>
-          </a:prstGeom>
-          <a:noFill/>
-          <a:ln/>
-        </p:spPr>
-        <p:txBody>
-          <a:bodyPr wrap="square" lIns="0" tIns="0" rIns="0" bIns="0" rtlCol="0" anchor="ctr"/>
-          <a:lstStyle/>
-          <a:p>
-            <a:pPr indent="0" marL="0">
-              <a:buNone/>
-            </a:pPr>
-            <a:r>
-              <a:rPr lang="en-US" sz="1250" dirty="0">
+            <a:endParaRPr lang="en-US" sz="1400" dirty="0"/>
+          </a:p>
+        </p:txBody>
+      </p:sp>
+      <p:sp>
+        <p:nvSpPr>
+          <p:cNvPr id="15" name="Text 13"/>
+          <p:cNvSpPr/>
+          <p:nvPr/>
+        </p:nvSpPr>
+        <p:spPr>
+          <a:xfrm>
+            <a:off x="9345168" y="2468880"/>
+            <a:ext cx="2249424" cy="1920240"/>
+          </a:xfrm>
+          <a:prstGeom prst="rect">
+            <a:avLst/>
+          </a:prstGeom>
+          <a:noFill/>
+          <a:ln/>
+        </p:spPr>
+        <p:txBody>
+          <a:bodyPr wrap="square" lIns="0" tIns="0" rIns="0" bIns="0" rtlCol="0" anchor="ctr"/>
+          <a:lstStyle/>
+          <a:p>
+            <a:pPr indent="0" marL="0">
+              <a:buNone/>
+            </a:pPr>
+            <a:r>
+              <a:rPr lang="en-US" sz="1150" dirty="0">
                 <a:solidFill>
                   <a:srgbClr val="262626"/>
                 </a:solidFill>
@@ -8642,15 +8747,15 @@
                 <a:ea typeface="Calibri" pitchFamily="34" charset="-122"/>
                 <a:cs typeface="Calibri" pitchFamily="34" charset="-120"/>
               </a:rPr>
-              <a:t>Run full stages with a classmate using the rubric. Interviewer practices probing; candidate practices under eye contact. Swap.</a:t>
-            </a:r>
-            <a:endParaRPr lang="en-US" sz="1250" dirty="0"/>
-          </a:p>
-        </p:txBody>
-      </p:sp>
-      <p:sp>
-        <p:nvSpPr>
-          <p:cNvPr id="13" name="Shape 11"/>
+              <a:t>Full stages with a classmate on the rubric — probing practice for one, eye contact for the other. Swap.</a:t>
+            </a:r>
+            <a:endParaRPr lang="en-US" sz="1150" dirty="0"/>
+          </a:p>
+        </p:txBody>
+      </p:sp>
+      <p:sp>
+        <p:nvSpPr>
+          <p:cNvPr id="16" name="Shape 14"/>
           <p:cNvSpPr/>
           <p:nvPr/>
         </p:nvSpPr>
@@ -8677,7 +8782,7 @@
       </p:sp>
       <p:sp>
         <p:nvSpPr>
-          <p:cNvPr id="14" name="Text 12"/>
+          <p:cNvPr id="17" name="Text 15"/>
           <p:cNvSpPr/>
           <p:nvPr/>
         </p:nvSpPr>
@@ -8730,7 +8835,7 @@
       </p:sp>
       <p:sp>
         <p:nvSpPr>
-          <p:cNvPr id="15" name="Text 13"/>
+          <p:cNvPr id="18" name="Text 16"/>
           <p:cNvSpPr/>
           <p:nvPr/>
         </p:nvSpPr>

--- a/Eccles_MBA_Interview_Prep_Student_Overview.pptx
+++ b/Eccles_MBA_Interview_Prep_Student_Overview.pptx
@@ -1217,7 +1217,7 @@
           <a:p>
             <a:r>
               <a:rPr lang="en-US" dirty="0"/>
-              <a:t>The Reflection beat is the differentiator — almost nobody does it unprompted, and it's literally written into the 4 anchor as 'a repeatable method.' Have students end every practice answer with one sentence: 'What I took from that, and where I've used it since, is…'. On the honesty line: don't soften it. The rubric rewards ownership and reflection, not scale — a modest true story with a clear lesson outscores an impressive fake that collapses under 'what did you do next?'</a:t>
+              <a:t>CARL is the framework from the careers class — Context/Challenge, Action, Results, Learning — and every tool in this system now speaks it: the AI coach probes for it, the mock lifecycle checks it, the guide teaches it. The Learning beat is the differentiator; almost nobody does it unprompted, and it's literally written into the 4 anchor as a repeatable method. Have students end every practice answer with one sentence: 'What I took from that, and how I've used it since, is…'. Also teach Tell-then-Show from class: answer first, story second — interviewers relax when they hear the answer early. On honesty: don't soften it — a modest true story with a clear Learning outscores an impressive fake that collapses under 'what did you do next?'</a:t>
             </a:r>
             <a:endParaRPr lang="en-US" dirty="0"/>
           </a:p>
@@ -1305,7 +1305,7 @@
           <a:p>
             <a:r>
               <a:rPr lang="en-US" dirty="0"/>
-              <a:t>The prep guide (Word doc) has a fill-in matrix for this — story, competencies served, the number, the reflection line. Push the failure stories: Stage 4 runs on hard calls, and students systematically under-prepare them. A good exercise for a session: five minutes, everyone lists their raw material — most students discover they have 15+ candidate stories and have simply never organized them.</a:t>
+              <a:t>The prep guide (Word doc) has a fill-in matrix for this — story, competencies served, the number, the Learning line. Push the failure stories: Stage 4 runs on hard calls, and students systematically under-prepare them. A good exercise for a session: five minutes, everyone lists their raw material — most students discover they have 15+ candidate stories and have simply never organized them.</a:t>
             </a:r>
             <a:endParaRPr lang="en-US" dirty="0"/>
           </a:p>
@@ -3370,7 +3370,7 @@
                 <a:ea typeface="Calibri" pitchFamily="34" charset="-122"/>
                 <a:cs typeface="Calibri" pitchFamily="34" charset="-120"/>
               </a:rPr>
-              <a:t>Build the 8–10 story bank · one number and one reflection line per story</a:t>
+              <a:t>Build the 8–10 story bank · one number and one Learning line per story</a:t>
             </a:r>
             <a:endParaRPr lang="en-US" sz="1450" dirty="0"/>
           </a:p>
@@ -6541,7 +6541,7 @@
                 <a:ea typeface="Cambria" pitchFamily="34" charset="-122"/>
                 <a:cs typeface="Cambria" pitchFamily="34" charset="-120"/>
               </a:rPr>
-              <a:t>STAR/CAR + R: five beats, and the fifth wins</a:t>
+              <a:t>CARL: four beats, and the fourth wins</a:t>
             </a:r>
             <a:endParaRPr lang="en-US" sz="3100" dirty="0"/>
           </a:p>
@@ -6555,12 +6555,12 @@
         </p:nvSpPr>
         <p:spPr>
           <a:xfrm>
-            <a:off x="548640" y="1463040"/>
-            <a:ext cx="11091672" cy="841248"/>
+            <a:off x="548640" y="1371600"/>
+            <a:ext cx="11091672" cy="932688"/>
           </a:xfrm>
           <a:prstGeom prst="roundRect">
             <a:avLst>
-              <a:gd name="adj" fmla="val 8696"/>
+              <a:gd name="adj" fmla="val 7843"/>
             </a:avLst>
           </a:prstGeom>
           <a:solidFill>
@@ -6582,24 +6582,24 @@
         </p:nvSpPr>
         <p:spPr>
           <a:xfrm>
-            <a:off x="777240" y="1536192"/>
-            <a:ext cx="822960" cy="685800"/>
-          </a:xfrm>
-          <a:prstGeom prst="rect">
-            <a:avLst/>
-          </a:prstGeom>
-          <a:noFill/>
-          <a:ln/>
-        </p:spPr>
-        <p:txBody>
-          <a:bodyPr wrap="square" lIns="0" tIns="0" rIns="0" bIns="0" rtlCol="0" anchor="ctr"/>
-          <a:lstStyle/>
-          <a:p>
-            <a:pPr indent="0" marL="0">
-              <a:buNone/>
-            </a:pPr>
-            <a:r>
-              <a:rPr lang="en-US" sz="2000" b="1" dirty="0">
+            <a:off x="777240" y="1463040"/>
+            <a:ext cx="822960" cy="749808"/>
+          </a:xfrm>
+          <a:prstGeom prst="rect">
+            <a:avLst/>
+          </a:prstGeom>
+          <a:noFill/>
+          <a:ln/>
+        </p:spPr>
+        <p:txBody>
+          <a:bodyPr wrap="square" lIns="0" tIns="0" rIns="0" bIns="0" rtlCol="0" anchor="ctr"/>
+          <a:lstStyle/>
+          <a:p>
+            <a:pPr indent="0" marL="0">
+              <a:buNone/>
+            </a:pPr>
+            <a:r>
+              <a:rPr lang="en-US" sz="2200" b="1" dirty="0">
                 <a:solidFill>
                   <a:srgbClr val="890000"/>
                 </a:solidFill>
@@ -6607,9 +6607,9 @@
                 <a:ea typeface="Cambria" pitchFamily="34" charset="-122"/>
                 <a:cs typeface="Cambria" pitchFamily="34" charset="-120"/>
               </a:rPr>
-              <a:t>S</a:t>
-            </a:r>
-            <a:endParaRPr lang="en-US" sz="2000" dirty="0"/>
+              <a:t>C</a:t>
+            </a:r>
+            <a:endParaRPr lang="en-US" sz="2200" dirty="0"/>
           </a:p>
         </p:txBody>
       </p:sp>
@@ -6621,8 +6621,8 @@
         </p:nvSpPr>
         <p:spPr>
           <a:xfrm>
-            <a:off x="1645920" y="1536192"/>
-            <a:ext cx="1645920" cy="685800"/>
+            <a:off x="1645920" y="1463040"/>
+            <a:ext cx="2103120" cy="749808"/>
           </a:xfrm>
           <a:prstGeom prst="rect">
             <a:avLst/>
@@ -6646,7 +6646,7 @@
                 <a:ea typeface="Calibri" pitchFamily="34" charset="-122"/>
                 <a:cs typeface="Calibri" pitchFamily="34" charset="-120"/>
               </a:rPr>
-              <a:t>Situation</a:t>
+              <a:t>Context / Challenge</a:t>
             </a:r>
             <a:endParaRPr lang="en-US" sz="1400" dirty="0"/>
           </a:p>
@@ -6660,24 +6660,24 @@
         </p:nvSpPr>
         <p:spPr>
           <a:xfrm>
-            <a:off x="3383280" y="1536192"/>
-            <a:ext cx="8046720" cy="685800"/>
-          </a:xfrm>
-          <a:prstGeom prst="rect">
-            <a:avLst/>
-          </a:prstGeom>
-          <a:noFill/>
-          <a:ln/>
-        </p:spPr>
-        <p:txBody>
-          <a:bodyPr wrap="square" lIns="0" tIns="0" rIns="0" bIns="0" rtlCol="0" anchor="ctr"/>
-          <a:lstStyle/>
-          <a:p>
-            <a:pPr indent="0" marL="0">
-              <a:buNone/>
-            </a:pPr>
-            <a:r>
-              <a:rPr lang="en-US" sz="1300" dirty="0">
+            <a:off x="3840480" y="1463040"/>
+            <a:ext cx="7589520" cy="749808"/>
+          </a:xfrm>
+          <a:prstGeom prst="rect">
+            <a:avLst/>
+          </a:prstGeom>
+          <a:noFill/>
+          <a:ln/>
+        </p:spPr>
+        <p:txBody>
+          <a:bodyPr wrap="square" lIns="0" tIns="0" rIns="0" bIns="0" rtlCol="0" anchor="ctr"/>
+          <a:lstStyle/>
+          <a:p>
+            <a:pPr indent="0" marL="0">
+              <a:buNone/>
+            </a:pPr>
+            <a:r>
+              <a:rPr lang="en-US" sz="1250" dirty="0">
                 <a:solidFill>
                   <a:srgbClr val="262626"/>
                 </a:solidFill>
@@ -6685,9 +6685,9 @@
                 <a:ea typeface="Calibri" pitchFamily="34" charset="-122"/>
                 <a:cs typeface="Calibri" pitchFamily="34" charset="-120"/>
               </a:rPr>
-              <a:t>One or two sentences of context. Not five.</a:t>
-            </a:r>
-            <a:endParaRPr lang="en-US" sz="1300" dirty="0"/>
+              <a:t>What challenge, for whom, why it mattered — 2–3 sentences, then move.</a:t>
+            </a:r>
+            <a:endParaRPr lang="en-US" sz="1250" dirty="0"/>
           </a:p>
         </p:txBody>
       </p:sp>
@@ -6699,12 +6699,12 @@
         </p:nvSpPr>
         <p:spPr>
           <a:xfrm>
-            <a:off x="548640" y="2377440"/>
-            <a:ext cx="11091672" cy="841248"/>
+            <a:off x="548640" y="2304288"/>
+            <a:ext cx="11091672" cy="932688"/>
           </a:xfrm>
           <a:prstGeom prst="roundRect">
             <a:avLst>
-              <a:gd name="adj" fmla="val 8696"/>
+              <a:gd name="adj" fmla="val 7843"/>
             </a:avLst>
           </a:prstGeom>
           <a:solidFill>
@@ -6726,24 +6726,24 @@
         </p:nvSpPr>
         <p:spPr>
           <a:xfrm>
-            <a:off x="777240" y="2450592"/>
-            <a:ext cx="822960" cy="685800"/>
-          </a:xfrm>
-          <a:prstGeom prst="rect">
-            <a:avLst/>
-          </a:prstGeom>
-          <a:noFill/>
-          <a:ln/>
-        </p:spPr>
-        <p:txBody>
-          <a:bodyPr wrap="square" lIns="0" tIns="0" rIns="0" bIns="0" rtlCol="0" anchor="ctr"/>
-          <a:lstStyle/>
-          <a:p>
-            <a:pPr indent="0" marL="0">
-              <a:buNone/>
-            </a:pPr>
-            <a:r>
-              <a:rPr lang="en-US" sz="2000" b="1" dirty="0">
+            <a:off x="777240" y="2395728"/>
+            <a:ext cx="822960" cy="749808"/>
+          </a:xfrm>
+          <a:prstGeom prst="rect">
+            <a:avLst/>
+          </a:prstGeom>
+          <a:noFill/>
+          <a:ln/>
+        </p:spPr>
+        <p:txBody>
+          <a:bodyPr wrap="square" lIns="0" tIns="0" rIns="0" bIns="0" rtlCol="0" anchor="ctr"/>
+          <a:lstStyle/>
+          <a:p>
+            <a:pPr indent="0" marL="0">
+              <a:buNone/>
+            </a:pPr>
+            <a:r>
+              <a:rPr lang="en-US" sz="2200" b="1" dirty="0">
                 <a:solidFill>
                   <a:srgbClr val="890000"/>
                 </a:solidFill>
@@ -6751,9 +6751,9 @@
                 <a:ea typeface="Cambria" pitchFamily="34" charset="-122"/>
                 <a:cs typeface="Cambria" pitchFamily="34" charset="-120"/>
               </a:rPr>
-              <a:t>T</a:t>
-            </a:r>
-            <a:endParaRPr lang="en-US" sz="2000" dirty="0"/>
+              <a:t>A</a:t>
+            </a:r>
+            <a:endParaRPr lang="en-US" sz="2200" dirty="0"/>
           </a:p>
         </p:txBody>
       </p:sp>
@@ -6765,8 +6765,8 @@
         </p:nvSpPr>
         <p:spPr>
           <a:xfrm>
-            <a:off x="1645920" y="2450592"/>
-            <a:ext cx="1645920" cy="685800"/>
+            <a:off x="1645920" y="2395728"/>
+            <a:ext cx="2103120" cy="749808"/>
           </a:xfrm>
           <a:prstGeom prst="rect">
             <a:avLst/>
@@ -6790,7 +6790,7 @@
                 <a:ea typeface="Calibri" pitchFamily="34" charset="-122"/>
                 <a:cs typeface="Calibri" pitchFamily="34" charset="-120"/>
               </a:rPr>
-              <a:t>Task</a:t>
+              <a:t>Action</a:t>
             </a:r>
             <a:endParaRPr lang="en-US" sz="1400" dirty="0"/>
           </a:p>
@@ -6804,24 +6804,24 @@
         </p:nvSpPr>
         <p:spPr>
           <a:xfrm>
-            <a:off x="3383280" y="2450592"/>
-            <a:ext cx="8046720" cy="685800"/>
-          </a:xfrm>
-          <a:prstGeom prst="rect">
-            <a:avLst/>
-          </a:prstGeom>
-          <a:noFill/>
-          <a:ln/>
-        </p:spPr>
-        <p:txBody>
-          <a:bodyPr wrap="square" lIns="0" tIns="0" rIns="0" bIns="0" rtlCol="0" anchor="ctr"/>
-          <a:lstStyle/>
-          <a:p>
-            <a:pPr indent="0" marL="0">
-              <a:buNone/>
-            </a:pPr>
-            <a:r>
-              <a:rPr lang="en-US" sz="1300" dirty="0">
+            <a:off x="3840480" y="2395728"/>
+            <a:ext cx="7589520" cy="749808"/>
+          </a:xfrm>
+          <a:prstGeom prst="rect">
+            <a:avLst/>
+          </a:prstGeom>
+          <a:noFill/>
+          <a:ln/>
+        </p:spPr>
+        <p:txBody>
+          <a:bodyPr wrap="square" lIns="0" tIns="0" rIns="0" bIns="0" rtlCol="0" anchor="ctr"/>
+          <a:lstStyle/>
+          <a:p>
+            <a:pPr indent="0" marL="0">
+              <a:buNone/>
+            </a:pPr>
+            <a:r>
+              <a:rPr lang="en-US" sz="1250" dirty="0">
                 <a:solidFill>
                   <a:srgbClr val="262626"/>
                 </a:solidFill>
@@ -6829,9 +6829,9 @@
                 <a:ea typeface="Calibri" pitchFamily="34" charset="-122"/>
                 <a:cs typeface="Calibri" pitchFamily="34" charset="-120"/>
               </a:rPr>
-              <a:t>What YOU were responsible for — not the team's mission.</a:t>
-            </a:r>
-            <a:endParaRPr lang="en-US" sz="1300" dirty="0"/>
+              <a:t>What YOU did, with specifics, first person singular. “We” gets probed until an “I” appears — volunteer it first.</a:t>
+            </a:r>
+            <a:endParaRPr lang="en-US" sz="1250" dirty="0"/>
           </a:p>
         </p:txBody>
       </p:sp>
@@ -6843,12 +6843,12 @@
         </p:nvSpPr>
         <p:spPr>
           <a:xfrm>
-            <a:off x="548640" y="3291840"/>
-            <a:ext cx="11091672" cy="841248"/>
+            <a:off x="548640" y="3236976"/>
+            <a:ext cx="11091672" cy="932688"/>
           </a:xfrm>
           <a:prstGeom prst="roundRect">
             <a:avLst>
-              <a:gd name="adj" fmla="val 8696"/>
+              <a:gd name="adj" fmla="val 7843"/>
             </a:avLst>
           </a:prstGeom>
           <a:solidFill>
@@ -6870,24 +6870,24 @@
         </p:nvSpPr>
         <p:spPr>
           <a:xfrm>
-            <a:off x="777240" y="3364992"/>
-            <a:ext cx="822960" cy="685800"/>
-          </a:xfrm>
-          <a:prstGeom prst="rect">
-            <a:avLst/>
-          </a:prstGeom>
-          <a:noFill/>
-          <a:ln/>
-        </p:spPr>
-        <p:txBody>
-          <a:bodyPr wrap="square" lIns="0" tIns="0" rIns="0" bIns="0" rtlCol="0" anchor="ctr"/>
-          <a:lstStyle/>
-          <a:p>
-            <a:pPr indent="0" marL="0">
-              <a:buNone/>
-            </a:pPr>
-            <a:r>
-              <a:rPr lang="en-US" sz="2000" b="1" dirty="0">
+            <a:off x="777240" y="3328416"/>
+            <a:ext cx="822960" cy="749808"/>
+          </a:xfrm>
+          <a:prstGeom prst="rect">
+            <a:avLst/>
+          </a:prstGeom>
+          <a:noFill/>
+          <a:ln/>
+        </p:spPr>
+        <p:txBody>
+          <a:bodyPr wrap="square" lIns="0" tIns="0" rIns="0" bIns="0" rtlCol="0" anchor="ctr"/>
+          <a:lstStyle/>
+          <a:p>
+            <a:pPr indent="0" marL="0">
+              <a:buNone/>
+            </a:pPr>
+            <a:r>
+              <a:rPr lang="en-US" sz="2200" b="1" dirty="0">
                 <a:solidFill>
                   <a:srgbClr val="890000"/>
                 </a:solidFill>
@@ -6895,9 +6895,9 @@
                 <a:ea typeface="Cambria" pitchFamily="34" charset="-122"/>
                 <a:cs typeface="Cambria" pitchFamily="34" charset="-120"/>
               </a:rPr>
-              <a:t>A</a:t>
-            </a:r>
-            <a:endParaRPr lang="en-US" sz="2000" dirty="0"/>
+              <a:t>R</a:t>
+            </a:r>
+            <a:endParaRPr lang="en-US" sz="2200" dirty="0"/>
           </a:p>
         </p:txBody>
       </p:sp>
@@ -6909,8 +6909,8 @@
         </p:nvSpPr>
         <p:spPr>
           <a:xfrm>
-            <a:off x="1645920" y="3364992"/>
-            <a:ext cx="1645920" cy="685800"/>
+            <a:off x="1645920" y="3328416"/>
+            <a:ext cx="2103120" cy="749808"/>
           </a:xfrm>
           <a:prstGeom prst="rect">
             <a:avLst/>
@@ -6934,7 +6934,7 @@
                 <a:ea typeface="Calibri" pitchFamily="34" charset="-122"/>
                 <a:cs typeface="Calibri" pitchFamily="34" charset="-120"/>
               </a:rPr>
-              <a:t>Action</a:t>
+              <a:t>Results</a:t>
             </a:r>
             <a:endParaRPr lang="en-US" sz="1400" dirty="0"/>
           </a:p>
@@ -6948,24 +6948,24 @@
         </p:nvSpPr>
         <p:spPr>
           <a:xfrm>
-            <a:off x="3383280" y="3364992"/>
-            <a:ext cx="8046720" cy="685800"/>
-          </a:xfrm>
-          <a:prstGeom prst="rect">
-            <a:avLst/>
-          </a:prstGeom>
-          <a:noFill/>
-          <a:ln/>
-        </p:spPr>
-        <p:txBody>
-          <a:bodyPr wrap="square" lIns="0" tIns="0" rIns="0" bIns="0" rtlCol="0" anchor="ctr"/>
-          <a:lstStyle/>
-          <a:p>
-            <a:pPr indent="0" marL="0">
-              <a:buNone/>
-            </a:pPr>
-            <a:r>
-              <a:rPr lang="en-US" sz="1300" dirty="0">
+            <a:off x="3840480" y="3328416"/>
+            <a:ext cx="7589520" cy="749808"/>
+          </a:xfrm>
+          <a:prstGeom prst="rect">
+            <a:avLst/>
+          </a:prstGeom>
+          <a:noFill/>
+          <a:ln/>
+        </p:spPr>
+        <p:txBody>
+          <a:bodyPr wrap="square" lIns="0" tIns="0" rIns="0" bIns="0" rtlCol="0" anchor="ctr"/>
+          <a:lstStyle/>
+          <a:p>
+            <a:pPr indent="0" marL="0">
+              <a:buNone/>
+            </a:pPr>
+            <a:r>
+              <a:rPr lang="en-US" sz="1250" dirty="0">
                 <a:solidFill>
                   <a:srgbClr val="262626"/>
                 </a:solidFill>
@@ -6973,9 +6973,9 @@
                 <a:ea typeface="Calibri" pitchFamily="34" charset="-122"/>
                 <a:cs typeface="Calibri" pitchFamily="34" charset="-120"/>
               </a:rPr>
-              <a:t>First person singular. “We” gets probed until an “I” appears — volunteer it first.</a:t>
-            </a:r>
-            <a:endParaRPr lang="en-US" sz="1300" dirty="0"/>
+              <a:t>Outcome and business impact, with metrics wherever you have them. An honest miss beats a vague win.</a:t>
+            </a:r>
+            <a:endParaRPr lang="en-US" sz="1250" dirty="0"/>
           </a:p>
         </p:txBody>
       </p:sp>
@@ -6987,156 +6987,12 @@
         </p:nvSpPr>
         <p:spPr>
           <a:xfrm>
-            <a:off x="548640" y="4206240"/>
-            <a:ext cx="11091672" cy="841248"/>
+            <a:off x="548640" y="4169664"/>
+            <a:ext cx="11091672" cy="932688"/>
           </a:xfrm>
           <a:prstGeom prst="roundRect">
             <a:avLst>
-              <a:gd name="adj" fmla="val 8696"/>
-            </a:avLst>
-          </a:prstGeom>
-          <a:solidFill>
-            <a:srgbClr val="FFFFFF"/>
-          </a:solidFill>
-          <a:ln w="9525">
-            <a:solidFill>
-              <a:srgbClr val="E2E6E6"/>
-            </a:solidFill>
-            <a:prstDash val="solid"/>
-          </a:ln>
-        </p:spPr>
-      </p:sp>
-      <p:sp>
-        <p:nvSpPr>
-          <p:cNvPr id="17" name="Text 15"/>
-          <p:cNvSpPr/>
-          <p:nvPr/>
-        </p:nvSpPr>
-        <p:spPr>
-          <a:xfrm>
-            <a:off x="777240" y="4279392"/>
-            <a:ext cx="822960" cy="685800"/>
-          </a:xfrm>
-          <a:prstGeom prst="rect">
-            <a:avLst/>
-          </a:prstGeom>
-          <a:noFill/>
-          <a:ln/>
-        </p:spPr>
-        <p:txBody>
-          <a:bodyPr wrap="square" lIns="0" tIns="0" rIns="0" bIns="0" rtlCol="0" anchor="ctr"/>
-          <a:lstStyle/>
-          <a:p>
-            <a:pPr indent="0" marL="0">
-              <a:buNone/>
-            </a:pPr>
-            <a:r>
-              <a:rPr lang="en-US" sz="2000" b="1" dirty="0">
-                <a:solidFill>
-                  <a:srgbClr val="890000"/>
-                </a:solidFill>
-                <a:latin typeface="Cambria" pitchFamily="34" charset="0"/>
-                <a:ea typeface="Cambria" pitchFamily="34" charset="-122"/>
-                <a:cs typeface="Cambria" pitchFamily="34" charset="-120"/>
-              </a:rPr>
-              <a:t>R</a:t>
-            </a:r>
-            <a:endParaRPr lang="en-US" sz="2000" dirty="0"/>
-          </a:p>
-        </p:txBody>
-      </p:sp>
-      <p:sp>
-        <p:nvSpPr>
-          <p:cNvPr id="18" name="Text 16"/>
-          <p:cNvSpPr/>
-          <p:nvPr/>
-        </p:nvSpPr>
-        <p:spPr>
-          <a:xfrm>
-            <a:off x="1645920" y="4279392"/>
-            <a:ext cx="1645920" cy="685800"/>
-          </a:xfrm>
-          <a:prstGeom prst="rect">
-            <a:avLst/>
-          </a:prstGeom>
-          <a:noFill/>
-          <a:ln/>
-        </p:spPr>
-        <p:txBody>
-          <a:bodyPr wrap="square" lIns="0" tIns="0" rIns="0" bIns="0" rtlCol="0" anchor="ctr"/>
-          <a:lstStyle/>
-          <a:p>
-            <a:pPr indent="0" marL="0">
-              <a:buNone/>
-            </a:pPr>
-            <a:r>
-              <a:rPr lang="en-US" sz="1400" b="1" dirty="0">
-                <a:solidFill>
-                  <a:srgbClr val="1A1A1A"/>
-                </a:solidFill>
-                <a:latin typeface="Calibri" pitchFamily="34" charset="0"/>
-                <a:ea typeface="Calibri" pitchFamily="34" charset="-122"/>
-                <a:cs typeface="Calibri" pitchFamily="34" charset="-120"/>
-              </a:rPr>
-              <a:t>Result</a:t>
-            </a:r>
-            <a:endParaRPr lang="en-US" sz="1400" dirty="0"/>
-          </a:p>
-        </p:txBody>
-      </p:sp>
-      <p:sp>
-        <p:nvSpPr>
-          <p:cNvPr id="19" name="Text 17"/>
-          <p:cNvSpPr/>
-          <p:nvPr/>
-        </p:nvSpPr>
-        <p:spPr>
-          <a:xfrm>
-            <a:off x="3383280" y="4279392"/>
-            <a:ext cx="8046720" cy="685800"/>
-          </a:xfrm>
-          <a:prstGeom prst="rect">
-            <a:avLst/>
-          </a:prstGeom>
-          <a:noFill/>
-          <a:ln/>
-        </p:spPr>
-        <p:txBody>
-          <a:bodyPr wrap="square" lIns="0" tIns="0" rIns="0" bIns="0" rtlCol="0" anchor="ctr"/>
-          <a:lstStyle/>
-          <a:p>
-            <a:pPr indent="0" marL="0">
-              <a:buNone/>
-            </a:pPr>
-            <a:r>
-              <a:rPr lang="en-US" sz="1300" dirty="0">
-                <a:solidFill>
-                  <a:srgbClr val="262626"/>
-                </a:solidFill>
-                <a:latin typeface="Calibri" pitchFamily="34" charset="0"/>
-                <a:ea typeface="Calibri" pitchFamily="34" charset="-122"/>
-                <a:cs typeface="Calibri" pitchFamily="34" charset="-120"/>
-              </a:rPr>
-              <a:t>A number where you have one. An honest miss beats a vague win.</a:t>
-            </a:r>
-            <a:endParaRPr lang="en-US" sz="1300" dirty="0"/>
-          </a:p>
-        </p:txBody>
-      </p:sp>
-      <p:sp>
-        <p:nvSpPr>
-          <p:cNvPr id="20" name="Shape 18"/>
-          <p:cNvSpPr/>
-          <p:nvPr/>
-        </p:nvSpPr>
-        <p:spPr>
-          <a:xfrm>
-            <a:off x="548640" y="5120640"/>
-            <a:ext cx="11091672" cy="841248"/>
-          </a:xfrm>
-          <a:prstGeom prst="roundRect">
-            <a:avLst>
-              <a:gd name="adj" fmla="val 8696"/>
+              <a:gd name="adj" fmla="val 7843"/>
             </a:avLst>
           </a:prstGeom>
           <a:solidFill>
@@ -7152,30 +7008,30 @@
       </p:sp>
       <p:sp>
         <p:nvSpPr>
-          <p:cNvPr id="21" name="Text 19"/>
-          <p:cNvSpPr/>
-          <p:nvPr/>
-        </p:nvSpPr>
-        <p:spPr>
-          <a:xfrm>
-            <a:off x="777240" y="5193792"/>
-            <a:ext cx="822960" cy="685800"/>
-          </a:xfrm>
-          <a:prstGeom prst="rect">
-            <a:avLst/>
-          </a:prstGeom>
-          <a:noFill/>
-          <a:ln/>
-        </p:spPr>
-        <p:txBody>
-          <a:bodyPr wrap="square" lIns="0" tIns="0" rIns="0" bIns="0" rtlCol="0" anchor="ctr"/>
-          <a:lstStyle/>
-          <a:p>
-            <a:pPr indent="0" marL="0">
-              <a:buNone/>
-            </a:pPr>
-            <a:r>
-              <a:rPr lang="en-US" sz="2000" b="1" dirty="0">
+          <p:cNvPr id="17" name="Text 15"/>
+          <p:cNvSpPr/>
+          <p:nvPr/>
+        </p:nvSpPr>
+        <p:spPr>
+          <a:xfrm>
+            <a:off x="777240" y="4261104"/>
+            <a:ext cx="822960" cy="749808"/>
+          </a:xfrm>
+          <a:prstGeom prst="rect">
+            <a:avLst/>
+          </a:prstGeom>
+          <a:noFill/>
+          <a:ln/>
+        </p:spPr>
+        <p:txBody>
+          <a:bodyPr wrap="square" lIns="0" tIns="0" rIns="0" bIns="0" rtlCol="0" anchor="ctr"/>
+          <a:lstStyle/>
+          <a:p>
+            <a:pPr indent="0" marL="0">
+              <a:buNone/>
+            </a:pPr>
+            <a:r>
+              <a:rPr lang="en-US" sz="2200" b="1" dirty="0">
                 <a:solidFill>
                   <a:srgbClr val="3B6D11"/>
                 </a:solidFill>
@@ -7183,9 +7039,167 @@
                 <a:ea typeface="Cambria" pitchFamily="34" charset="-122"/>
                 <a:cs typeface="Cambria" pitchFamily="34" charset="-120"/>
               </a:rPr>
-              <a:t>+R</a:t>
-            </a:r>
-            <a:endParaRPr lang="en-US" sz="2000" dirty="0"/>
+              <a:t>L</a:t>
+            </a:r>
+            <a:endParaRPr lang="en-US" sz="2200" dirty="0"/>
+          </a:p>
+        </p:txBody>
+      </p:sp>
+      <p:sp>
+        <p:nvSpPr>
+          <p:cNvPr id="18" name="Text 16"/>
+          <p:cNvSpPr/>
+          <p:nvPr/>
+        </p:nvSpPr>
+        <p:spPr>
+          <a:xfrm>
+            <a:off x="1645920" y="4261104"/>
+            <a:ext cx="2103120" cy="749808"/>
+          </a:xfrm>
+          <a:prstGeom prst="rect">
+            <a:avLst/>
+          </a:prstGeom>
+          <a:noFill/>
+          <a:ln/>
+        </p:spPr>
+        <p:txBody>
+          <a:bodyPr wrap="square" lIns="0" tIns="0" rIns="0" bIns="0" rtlCol="0" anchor="ctr"/>
+          <a:lstStyle/>
+          <a:p>
+            <a:pPr indent="0" marL="0">
+              <a:buNone/>
+            </a:pPr>
+            <a:r>
+              <a:rPr lang="en-US" sz="1400" b="1" dirty="0">
+                <a:solidFill>
+                  <a:srgbClr val="1A1A1A"/>
+                </a:solidFill>
+                <a:latin typeface="Calibri" pitchFamily="34" charset="0"/>
+                <a:ea typeface="Calibri" pitchFamily="34" charset="-122"/>
+                <a:cs typeface="Calibri" pitchFamily="34" charset="-120"/>
+              </a:rPr>
+              <a:t>Learning</a:t>
+            </a:r>
+            <a:endParaRPr lang="en-US" sz="1400" dirty="0"/>
+          </a:p>
+        </p:txBody>
+      </p:sp>
+      <p:sp>
+        <p:nvSpPr>
+          <p:cNvPr id="19" name="Text 17"/>
+          <p:cNvSpPr/>
+          <p:nvPr/>
+        </p:nvSpPr>
+        <p:spPr>
+          <a:xfrm>
+            <a:off x="3840480" y="4261104"/>
+            <a:ext cx="7589520" cy="749808"/>
+          </a:xfrm>
+          <a:prstGeom prst="rect">
+            <a:avLst/>
+          </a:prstGeom>
+          <a:noFill/>
+          <a:ln/>
+        </p:spPr>
+        <p:txBody>
+          <a:bodyPr wrap="square" lIns="0" tIns="0" rIns="0" bIns="0" rtlCol="0" anchor="ctr"/>
+          <a:lstStyle/>
+          <a:p>
+            <a:pPr indent="0" marL="0">
+              <a:buNone/>
+            </a:pPr>
+            <a:r>
+              <a:rPr lang="en-US" sz="1250" dirty="0">
+                <a:solidFill>
+                  <a:srgbClr val="262626"/>
+                </a:solidFill>
+                <a:latin typeface="Calibri" pitchFamily="34" charset="0"/>
+                <a:ea typeface="Calibri" pitchFamily="34" charset="-122"/>
+                <a:cs typeface="Calibri" pitchFamily="34" charset="-120"/>
+              </a:rPr>
+              <a:t>What you learned and how you've used it since — or what you'd do differently. The “repeatable method” signal in the 4.</a:t>
+            </a:r>
+            <a:endParaRPr lang="en-US" sz="1250" dirty="0"/>
+          </a:p>
+        </p:txBody>
+      </p:sp>
+      <p:sp>
+        <p:nvSpPr>
+          <p:cNvPr id="20" name="Shape 18"/>
+          <p:cNvSpPr/>
+          <p:nvPr/>
+        </p:nvSpPr>
+        <p:spPr>
+          <a:xfrm>
+            <a:off x="548640" y="5138928"/>
+            <a:ext cx="11091672" cy="603504"/>
+          </a:xfrm>
+          <a:prstGeom prst="roundRect">
+            <a:avLst>
+              <a:gd name="adj" fmla="val 12121"/>
+            </a:avLst>
+          </a:prstGeom>
+          <a:solidFill>
+            <a:srgbClr val="F7F3F3"/>
+          </a:solidFill>
+          <a:ln w="9525">
+            <a:solidFill>
+              <a:srgbClr val="E2E6E6"/>
+            </a:solidFill>
+            <a:prstDash val="solid"/>
+          </a:ln>
+        </p:spPr>
+      </p:sp>
+      <p:sp>
+        <p:nvSpPr>
+          <p:cNvPr id="21" name="Text 19"/>
+          <p:cNvSpPr/>
+          <p:nvPr/>
+        </p:nvSpPr>
+        <p:spPr>
+          <a:xfrm>
+            <a:off x="777240" y="5193792"/>
+            <a:ext cx="10607040" cy="493776"/>
+          </a:xfrm>
+          <a:prstGeom prst="rect">
+            <a:avLst/>
+          </a:prstGeom>
+          <a:noFill/>
+          <a:ln/>
+        </p:spPr>
+        <p:txBody>
+          <a:bodyPr wrap="square" lIns="0" tIns="0" rIns="0" bIns="0" rtlCol="0" anchor="ctr"/>
+          <a:lstStyle/>
+          <a:p>
+            <a:pPr indent="0" marL="0">
+              <a:buNone/>
+            </a:pPr>
+            <a:r>
+              <a:rPr lang="en-US" sz="1400" b="1" dirty="0">
+                <a:solidFill>
+                  <a:srgbClr val="890000"/>
+                </a:solidFill>
+                <a:latin typeface="Calibri" pitchFamily="34" charset="0"/>
+                <a:ea typeface="Calibri" pitchFamily="34" charset="-122"/>
+                <a:cs typeface="Calibri" pitchFamily="34" charset="-120"/>
+              </a:rPr>
+              <a:t>Tell, then Show: </a:t>
+            </a:r>
+            <a:pPr indent="0" marL="0">
+              <a:buNone/>
+            </a:pPr>
+            <a:r>
+              <a:rPr lang="en-US" sz="1400" dirty="0">
+                <a:solidFill>
+                  <a:srgbClr val="262626"/>
+                </a:solidFill>
+                <a:latin typeface="Calibri" pitchFamily="34" charset="0"/>
+                <a:ea typeface="Calibri" pitchFamily="34" charset="-122"/>
+                <a:cs typeface="Calibri" pitchFamily="34" charset="-120"/>
+              </a:rPr>
+              <a:t>answer the question directly first — then bring it to life with the CARL story.</a:t>
+            </a:r>
+            <a:endParaRPr lang="en-US" sz="1400" dirty="0"/>
           </a:p>
         </p:txBody>
       </p:sp>
@@ -7197,118 +7211,40 @@
         </p:nvSpPr>
         <p:spPr>
           <a:xfrm>
-            <a:off x="1645920" y="5193792"/>
-            <a:ext cx="1645920" cy="685800"/>
-          </a:xfrm>
-          <a:prstGeom prst="rect">
-            <a:avLst/>
-          </a:prstGeom>
-          <a:noFill/>
-          <a:ln/>
-        </p:spPr>
-        <p:txBody>
-          <a:bodyPr wrap="square" lIns="0" tIns="0" rIns="0" bIns="0" rtlCol="0" anchor="ctr"/>
-          <a:lstStyle/>
-          <a:p>
-            <a:pPr indent="0" marL="0">
-              <a:buNone/>
-            </a:pPr>
-            <a:r>
-              <a:rPr lang="en-US" sz="1400" b="1" dirty="0">
-                <a:solidFill>
-                  <a:srgbClr val="1A1A1A"/>
-                </a:solidFill>
-                <a:latin typeface="Calibri" pitchFamily="34" charset="0"/>
-                <a:ea typeface="Calibri" pitchFamily="34" charset="-122"/>
-                <a:cs typeface="Calibri" pitchFamily="34" charset="-120"/>
-              </a:rPr>
-              <a:t>Reflection</a:t>
-            </a:r>
-            <a:endParaRPr lang="en-US" sz="1400" dirty="0"/>
+            <a:off x="548640" y="5852160"/>
+            <a:ext cx="11064240" cy="365760"/>
+          </a:xfrm>
+          <a:prstGeom prst="rect">
+            <a:avLst/>
+          </a:prstGeom>
+          <a:noFill/>
+          <a:ln/>
+        </p:spPr>
+        <p:txBody>
+          <a:bodyPr wrap="square" lIns="0" tIns="0" rIns="0" bIns="0" rtlCol="0" anchor="ctr"/>
+          <a:lstStyle/>
+          <a:p>
+            <a:pPr indent="0" marL="0">
+              <a:buNone/>
+            </a:pPr>
+            <a:r>
+              <a:rPr lang="en-US" sz="1250" b="1" dirty="0">
+                <a:solidFill>
+                  <a:srgbClr val="890000"/>
+                </a:solidFill>
+                <a:latin typeface="Calibri" pitchFamily="34" charset="0"/>
+                <a:ea typeface="Calibri" pitchFamily="34" charset="-122"/>
+                <a:cs typeface="Calibri" pitchFamily="34" charset="-120"/>
+              </a:rPr>
+              <a:t>Never inflate or invent: probes collapse fabricated stories into a 1 plus a risk flag.</a:t>
+            </a:r>
+            <a:endParaRPr lang="en-US" sz="1250" dirty="0"/>
           </a:p>
         </p:txBody>
       </p:sp>
       <p:sp>
         <p:nvSpPr>
           <p:cNvPr id="23" name="Text 21"/>
-          <p:cNvSpPr/>
-          <p:nvPr/>
-        </p:nvSpPr>
-        <p:spPr>
-          <a:xfrm>
-            <a:off x="3383280" y="5193792"/>
-            <a:ext cx="8046720" cy="685800"/>
-          </a:xfrm>
-          <a:prstGeom prst="rect">
-            <a:avLst/>
-          </a:prstGeom>
-          <a:noFill/>
-          <a:ln/>
-        </p:spPr>
-        <p:txBody>
-          <a:bodyPr wrap="square" lIns="0" tIns="0" rIns="0" bIns="0" rtlCol="0" anchor="ctr"/>
-          <a:lstStyle/>
-          <a:p>
-            <a:pPr indent="0" marL="0">
-              <a:buNone/>
-            </a:pPr>
-            <a:r>
-              <a:rPr lang="en-US" sz="1300" dirty="0">
-                <a:solidFill>
-                  <a:srgbClr val="262626"/>
-                </a:solidFill>
-                <a:latin typeface="Calibri" pitchFamily="34" charset="0"/>
-                <a:ea typeface="Calibri" pitchFamily="34" charset="-122"/>
-                <a:cs typeface="Calibri" pitchFamily="34" charset="-120"/>
-              </a:rPr>
-              <a:t>What you learned and where you've applied it since — the “repeatable method” signal in the 4.</a:t>
-            </a:r>
-            <a:endParaRPr lang="en-US" sz="1300" dirty="0"/>
-          </a:p>
-        </p:txBody>
-      </p:sp>
-      <p:sp>
-        <p:nvSpPr>
-          <p:cNvPr id="24" name="Text 22"/>
-          <p:cNvSpPr/>
-          <p:nvPr/>
-        </p:nvSpPr>
-        <p:spPr>
-          <a:xfrm>
-            <a:off x="548640" y="6126480"/>
-            <a:ext cx="11064240" cy="457200"/>
-          </a:xfrm>
-          <a:prstGeom prst="rect">
-            <a:avLst/>
-          </a:prstGeom>
-          <a:noFill/>
-          <a:ln/>
-        </p:spPr>
-        <p:txBody>
-          <a:bodyPr wrap="square" lIns="0" tIns="0" rIns="0" bIns="0" rtlCol="0" anchor="ctr"/>
-          <a:lstStyle/>
-          <a:p>
-            <a:pPr indent="0" marL="0">
-              <a:buNone/>
-            </a:pPr>
-            <a:r>
-              <a:rPr lang="en-US" sz="1350" b="1" dirty="0">
-                <a:solidFill>
-                  <a:srgbClr val="890000"/>
-                </a:solidFill>
-                <a:latin typeface="Calibri" pitchFamily="34" charset="0"/>
-                <a:ea typeface="Calibri" pitchFamily="34" charset="-122"/>
-                <a:cs typeface="Calibri" pitchFamily="34" charset="-120"/>
-              </a:rPr>
-              <a:t>Never inflate or invent: trained interviewers probe every story from three angles, and a fabricated example collapses into a 1 plus a risk flag.</a:t>
-            </a:r>
-            <a:endParaRPr lang="en-US" sz="1350" dirty="0"/>
-          </a:p>
-        </p:txBody>
-      </p:sp>
-      <p:sp>
-        <p:nvSpPr>
-          <p:cNvPr id="25" name="Text 23"/>
           <p:cNvSpPr/>
           <p:nvPr/>
         </p:nvSpPr>
@@ -7581,7 +7517,7 @@
                 <a:ea typeface="Calibri" pitchFamily="34" charset="-122"/>
                 <a:cs typeface="Calibri" pitchFamily="34" charset="-120"/>
               </a:rPr>
-              <a:t>Write the Reflection line for each: what you learned, where you've used it since</a:t>
+              <a:t>Write the Learning line for each: what you learned, how you've used it since</a:t>
             </a:r>
             <a:endParaRPr lang="en-US" sz="1500" dirty="0"/>
           </a:p>

--- a/Eccles_MBA_Interview_Prep_Student_Overview.pptx
+++ b/Eccles_MBA_Interview_Prep_Student_Overview.pptx
@@ -1305,7 +1305,7 @@
           <a:p>
             <a:r>
               <a:rPr lang="en-US" dirty="0"/>
-              <a:t>The prep guide (Word doc) has a fill-in matrix for this — story, competencies served, the number, the Learning line. Push the failure stories: Stage 4 runs on hard calls, and students systematically under-prepare them. A good exercise for a session: five minutes, everyone lists their raw material — most students discover they have 15+ candidate stories and have simply never organized them.</a:t>
+              <a:t>New: the Mock Interview Lifecycle opens with a Strengths &amp; Weaknesses — Top Behavioral Stories track built from the careers-class question set plus classic stumpers — running it IS building the story bank, so point students there first. The prep guide (Word doc) has a fill-in matrix for this — story, competencies served, the number, the Learning line. Push the failure stories: Stage 4 runs on hard calls, and students systematically under-prepare them. A good exercise for a session: five minutes, everyone lists their raw material — most students discover they have 15+ candidate stories and have simply never organized them.</a:t>
             </a:r>
             <a:endParaRPr lang="en-US" dirty="0"/>
           </a:p>

--- a/Eccles_MBA_Interview_Prep_Student_Overview.pptx
+++ b/Eccles_MBA_Interview_Prep_Student_Overview.pptx
@@ -3666,6 +3666,51 @@
           </a:p>
         </p:txBody>
       </p:sp>
+      <p:sp>
+        <p:nvSpPr>
+          <p:cNvPr id="14" name="TextBox 13"/>
+          <p:cNvSpPr txBox="1"/>
+          <p:nvPr/>
+        </p:nvSpPr>
+        <p:spPr>
+          <a:xfrm>
+            <a:off x="548640" y="5989320"/>
+            <a:ext cx="11064240" cy="731520"/>
+          </a:xfrm>
+          <a:prstGeom prst="rect">
+            <a:avLst/>
+          </a:prstGeom>
+          <a:noFill/>
+        </p:spPr>
+        <p:txBody>
+          <a:bodyPr wrap="square">
+            <a:spAutoFit/>
+          </a:bodyPr>
+          <a:lstStyle/>
+          <a:p>
+            <a:r>
+              <a:rPr sz="850">
+                <a:solidFill>
+                  <a:srgbClr val="B0B0B0"/>
+                </a:solidFill>
+                <a:latin typeface="Calibri"/>
+              </a:rPr>
+              <a:t>Developed by Cory Burk, Senior Manager, Program Management · Full-Time MBA Program · David Eccles School of Business.</a:t>
+            </a:r>
+          </a:p>
+          <a:p>
+            <a:r>
+              <a:rPr sz="850">
+                <a:solidFill>
+                  <a:srgbClr val="B0B0B0"/>
+                </a:solidFill>
+                <a:latin typeface="Calibri"/>
+              </a:rPr>
+              <a:t>© 2026 University of Utah, David Eccles School of Business. All rights reserved.</a:t>
+            </a:r>
+          </a:p>
+        </p:txBody>
+      </p:sp>
     </p:spTree>
   </p:cSld>
   <p:clrMapOvr>
